--- a/presentation/1007_18_SPHINCS-FTS-and-Virtual-Hypertree.pptx
+++ b/presentation/1007_18_SPHINCS-FTS-and-Virtual-Hypertree.pptx
@@ -18722,7 +18722,7 @@
                             <a:srgbClr val="000000"/>
                           </a:solidFill>
                         </a:rPr>
-                        <a:t>①</a:t>
+                        <a:t>1.</a:t>
                       </a:r>
                     </a:p>
                   </a:txBody>
@@ -18937,7 +18937,7 @@
                             <a:srgbClr val="000000"/>
                           </a:solidFill>
                         </a:rPr>
-                        <a:t>②</a:t>
+                        <a:t>2.</a:t>
                       </a:r>
                     </a:p>
                   </a:txBody>
@@ -19128,7 +19128,7 @@
                             <a:srgbClr val="000000"/>
                           </a:solidFill>
                         </a:rPr>
-                        <a:t>맨 아래</a:t>
+                        <a:t>3.</a:t>
                       </a:r>
                     </a:p>
                   </a:txBody>
@@ -19184,7 +19184,7 @@
                             <a:srgbClr val="000000"/>
                           </a:solidFill>
                         </a:rPr>
-                        <a:t>②에서 루트 대신 메시지 M을 확인한다</a:t>
+                        <a:t>맨 아래 층에서는 루트 대신 메시지 M을 확인한다</a:t>
                       </a:r>
                     </a:p>
                   </a:txBody>

--- a/presentation/1007_18_SPHINCS-FTS-and-Virtual-Hypertree.pptx
+++ b/presentation/1007_18_SPHINCS-FTS-and-Virtual-Hypertree.pptx
@@ -237,7 +237,7 @@
           <a:p>
             <a:fld id="{B52B40C2-3351-40A2-B46D-4B4F877A79B2}" type="datetimeFigureOut">
               <a:rPr lang="ko-KR" altLang="en-US" smtClean="0"/>
-              <a:t>2026-10-06</a:t>
+              <a:t>2026-10-07</a:t>
             </a:fld>
             <a:endParaRPr lang="ko-KR" altLang="en-US" dirty="0"/>
           </a:p>
@@ -3273,7 +3273,7 @@
             <a:fld id="{2ADF637E-82D6-4563-BCF0-C9101F2B5148}" type="datetime1">
               <a:rPr lang="ko-KR" altLang="en-US" smtClean="0"/>
               <a:pPr/>
-              <a:t>2026-10-06</a:t>
+              <a:t>2026-10-07</a:t>
             </a:fld>
             <a:endParaRPr lang="ko-KR" altLang="en-US" dirty="0"/>
           </a:p>
@@ -3488,7 +3488,7 @@
           <a:p>
             <a:fld id="{C9178607-39E6-4CB2-B3CB-AB428B3B6195}" type="datetime1">
               <a:rPr lang="ko-KR" altLang="en-US" smtClean="0"/>
-              <a:t>2026-10-06</a:t>
+              <a:t>2026-10-07</a:t>
             </a:fld>
             <a:endParaRPr lang="ko-KR" altLang="en-US" dirty="0"/>
           </a:p>
@@ -3696,7 +3696,7 @@
           <a:p>
             <a:fld id="{F578A2F2-325F-46A6-8956-F2A49A35BAF8}" type="datetime1">
               <a:rPr lang="ko-KR" altLang="en-US" smtClean="0"/>
-              <a:t>2026-10-06</a:t>
+              <a:t>2026-10-07</a:t>
             </a:fld>
             <a:endParaRPr lang="ko-KR" altLang="en-US" dirty="0"/>
           </a:p>
@@ -3948,7 +3948,7 @@
             <a:fld id="{D58CD677-7AD2-4A27-94BD-C65458D22428}" type="datetime1">
               <a:rPr lang="ko-KR" altLang="en-US" smtClean="0"/>
               <a:pPr/>
-              <a:t>2026-10-06</a:t>
+              <a:t>2026-10-07</a:t>
             </a:fld>
             <a:endParaRPr lang="ko-KR" altLang="en-US" dirty="0"/>
           </a:p>
@@ -6542,7 +6542,7 @@
           <a:p>
             <a:fld id="{2BEF52EC-B397-4D0A-AE91-E0D6840C85A1}" type="datetime1">
               <a:rPr lang="ko-KR" altLang="en-US" smtClean="0"/>
-              <a:t>2026-10-06</a:t>
+              <a:t>2026-10-07</a:t>
             </a:fld>
             <a:endParaRPr lang="ko-KR" altLang="en-US" dirty="0"/>
           </a:p>
@@ -6823,7 +6823,7 @@
           <a:p>
             <a:fld id="{32DD6007-6A42-4C9B-B218-6A32B3A38C67}" type="datetime1">
               <a:rPr lang="ko-KR" altLang="en-US" smtClean="0"/>
-              <a:t>2026-10-06</a:t>
+              <a:t>2026-10-07</a:t>
             </a:fld>
             <a:endParaRPr lang="ko-KR" altLang="en-US" dirty="0"/>
           </a:p>
@@ -7235,7 +7235,7 @@
           <a:p>
             <a:fld id="{F66658DF-8B5F-4351-A42C-BF3495DE7ABE}" type="datetime1">
               <a:rPr lang="ko-KR" altLang="en-US" smtClean="0"/>
-              <a:t>2026-10-06</a:t>
+              <a:t>2026-10-07</a:t>
             </a:fld>
             <a:endParaRPr lang="ko-KR" altLang="en-US" dirty="0"/>
           </a:p>
@@ -7376,7 +7376,7 @@
           <a:p>
             <a:fld id="{74359C48-8150-4FAB-8BEF-6AD61CFC9BBE}" type="datetime1">
               <a:rPr lang="ko-KR" altLang="en-US" smtClean="0"/>
-              <a:t>2026-10-06</a:t>
+              <a:t>2026-10-07</a:t>
             </a:fld>
             <a:endParaRPr lang="ko-KR" altLang="en-US" dirty="0"/>
           </a:p>
@@ -7489,7 +7489,7 @@
           <a:p>
             <a:fld id="{2D41DBCF-1091-470D-AC72-5CF3D00280AC}" type="datetime1">
               <a:rPr lang="ko-KR" altLang="en-US" smtClean="0"/>
-              <a:t>2026-10-06</a:t>
+              <a:t>2026-10-07</a:t>
             </a:fld>
             <a:endParaRPr lang="ko-KR" altLang="en-US" dirty="0"/>
           </a:p>
@@ -7800,7 +7800,7 @@
           <a:p>
             <a:fld id="{4024AE7C-57FB-4DBB-B90C-59145D637BF6}" type="datetime1">
               <a:rPr lang="ko-KR" altLang="en-US" smtClean="0"/>
-              <a:t>2026-10-06</a:t>
+              <a:t>2026-10-07</a:t>
             </a:fld>
             <a:endParaRPr lang="ko-KR" altLang="en-US" dirty="0"/>
           </a:p>
@@ -8088,7 +8088,7 @@
           <a:p>
             <a:fld id="{17D92253-43A0-46E3-918E-3929407A8C01}" type="datetime1">
               <a:rPr lang="ko-KR" altLang="en-US" smtClean="0"/>
-              <a:t>2026-10-06</a:t>
+              <a:t>2026-10-07</a:t>
             </a:fld>
             <a:endParaRPr lang="ko-KR" altLang="en-US" dirty="0"/>
           </a:p>
@@ -9149,7 +9149,7 @@
           <a:p>
             <a:fld id="{75D61A29-800E-482A-B0FD-5A04401ECD92}" type="datetime1">
               <a:rPr lang="ko-KR" altLang="en-US" smtClean="0"/>
-              <a:t>2026-10-06</a:t>
+              <a:t>2026-10-07</a:t>
             </a:fld>
             <a:endParaRPr lang="ko-KR" altLang="en-US" dirty="0"/>
           </a:p>
@@ -9736,17 +9736,25 @@
                   <a:buAutoNum type="arabicPeriod"/>
                 </a:pPr>
                 <a:r>
-                  <a:rPr sz="1800" dirty="0">
+                  <a:rPr lang="en-US" altLang="ko-KR" sz="1800" dirty="0">
                     <a:solidFill>
                       <a:srgbClr val="000000"/>
                     </a:solidFill>
                   </a:rPr>
-                  <a:t>Alice의 공개키 </a:t>
+                  <a:t>Alice</a:t>
+                </a:r>
+                <a:r>
+                  <a:rPr lang="ko-KR" altLang="en-US" sz="1800" dirty="0">
+                    <a:solidFill>
+                      <a:srgbClr val="000000"/>
+                    </a:solidFill>
+                  </a:rPr>
+                  <a:t>의 공개키 </a:t>
                 </a:r>
                 <a14:m>
                   <m:oMath xmlns:m="http://schemas.openxmlformats.org/officeDocument/2006/math">
                     <m:r>
-                      <a:rPr lang="en-US" i="1">
+                      <a:rPr lang="ko-KR" altLang="en-US" i="1">
                         <a:solidFill>
                           <a:srgbClr val="000000"/>
                         </a:solidFill>
@@ -9757,7 +9765,7 @@
                   </m:oMath>
                 </a14:m>
                 <a:r>
-                  <a:rPr sz="1800" dirty="0">
+                  <a:rPr lang="ko-KR" altLang="en-US" sz="1800" dirty="0">
                     <a:solidFill>
                       <a:srgbClr val="000000"/>
                     </a:solidFill>
@@ -9770,7 +9778,7 @@
                   <a:buAutoNum type="arabicPeriod"/>
                 </a:pPr>
                 <a:r>
-                  <a:rPr sz="1800" dirty="0">
+                  <a:rPr lang="ko-KR" altLang="en-US" sz="1800" dirty="0">
                     <a:solidFill>
                       <a:srgbClr val="000000"/>
                     </a:solidFill>
@@ -9780,7 +9788,7 @@
                 <a14:m>
                   <m:oMath xmlns:m="http://schemas.openxmlformats.org/officeDocument/2006/math">
                     <m:r>
-                      <a:rPr lang="en-US" i="1">
+                      <a:rPr lang="en-US" altLang="ko-KR" i="1">
                         <a:solidFill>
                           <a:srgbClr val="000000"/>
                         </a:solidFill>
@@ -9789,7 +9797,7 @@
                       <m:t>h</m:t>
                     </m:r>
                     <m:r>
-                      <a:rPr lang="en-US" i="1">
+                      <a:rPr lang="en-US" altLang="ko-KR" i="1">
                         <a:solidFill>
                           <a:srgbClr val="000000"/>
                         </a:solidFill>
@@ -9798,7 +9806,7 @@
                       <m:t>=</m:t>
                     </m:r>
                     <m:r>
-                      <a:rPr lang="en-US" i="1">
+                      <a:rPr lang="ko-KR" altLang="en-US" i="1">
                         <a:solidFill>
                           <a:srgbClr val="000000"/>
                         </a:solidFill>
@@ -9807,7 +9815,7 @@
                       <m:t>𝐻</m:t>
                     </m:r>
                     <m:r>
-                      <a:rPr lang="en-US" i="1">
+                      <a:rPr lang="en-US" altLang="ko-KR" i="1">
                         <a:solidFill>
                           <a:srgbClr val="000000"/>
                         </a:solidFill>
@@ -9816,7 +9824,7 @@
                       <m:t>(</m:t>
                     </m:r>
                     <m:r>
-                      <a:rPr lang="en-US" i="1">
+                      <a:rPr lang="ko-KR" altLang="en-US" i="1">
                         <a:solidFill>
                           <a:srgbClr val="000000"/>
                         </a:solidFill>
@@ -9825,7 +9833,7 @@
                       <m:t>𝐶</m:t>
                     </m:r>
                     <m:r>
-                      <a:rPr lang="en-US" i="1">
+                      <a:rPr lang="en-US" altLang="ko-KR" i="1">
                         <a:solidFill>
                           <a:srgbClr val="000000"/>
                         </a:solidFill>
@@ -9834,7 +9842,7 @@
                       <m:t>,</m:t>
                     </m:r>
                     <m:r>
-                      <a:rPr lang="en-US" i="1">
+                      <a:rPr lang="ko-KR" altLang="en-US" i="1">
                         <a:solidFill>
                           <a:srgbClr val="000000"/>
                         </a:solidFill>
@@ -9843,7 +9851,7 @@
                       <m:t>𝑀</m:t>
                     </m:r>
                     <m:r>
-                      <a:rPr lang="en-US" i="1">
+                      <a:rPr lang="en-US" altLang="ko-KR" i="1">
                         <a:solidFill>
                           <a:srgbClr val="000000"/>
                         </a:solidFill>
@@ -9854,12 +9862,44 @@
                   </m:oMath>
                 </a14:m>
                 <a:r>
-                  <a:rPr sz="1800" dirty="0">
+                  <a:rPr lang="ko-KR" altLang="en-US" sz="1800" dirty="0">
                     <a:solidFill>
                       <a:srgbClr val="000000"/>
                     </a:solidFill>
                   </a:rPr>
-                  <a:t>을 계산해 m비트씩 k조각으로 쪼갠다</a:t>
+                  <a:t>을 계산해 </a:t>
+                </a:r>
+                <a:r>
+                  <a:rPr lang="en-US" altLang="ko-KR" sz="1800" dirty="0">
+                    <a:solidFill>
+                      <a:srgbClr val="000000"/>
+                    </a:solidFill>
+                  </a:rPr>
+                  <a:t>m</a:t>
+                </a:r>
+                <a:r>
+                  <a:rPr lang="ko-KR" altLang="en-US" sz="1800" dirty="0">
+                    <a:solidFill>
+                      <a:srgbClr val="000000"/>
+                    </a:solidFill>
+                  </a:rPr>
+                  <a:t>비트씩 </a:t>
+                </a:r>
+                <a:r>
+                  <a:rPr lang="en-US" altLang="ko-KR" sz="1800" dirty="0">
+                    <a:solidFill>
+                      <a:srgbClr val="000000"/>
+                    </a:solidFill>
+                  </a:rPr>
+                  <a:t>k</a:t>
+                </a:r>
+                <a:r>
+                  <a:rPr lang="ko-KR" altLang="en-US" sz="1800" dirty="0">
+                    <a:solidFill>
+                      <a:srgbClr val="000000"/>
+                    </a:solidFill>
+                  </a:rPr>
+                  <a:t>조각으로 쪼갠다</a:t>
                 </a:r>
               </a:p>
               <a:p>
@@ -9867,7 +9907,7 @@
                   <a:buAutoNum type="arabicPeriod"/>
                 </a:pPr>
                 <a:r>
-                  <a:rPr sz="1800" dirty="0">
+                  <a:rPr lang="ko-KR" altLang="en-US" sz="1800" dirty="0">
                     <a:solidFill>
                       <a:srgbClr val="000000"/>
                     </a:solidFill>
@@ -9877,7 +9917,7 @@
                 <a14:m>
                   <m:oMath xmlns:m="http://schemas.openxmlformats.org/officeDocument/2006/math">
                     <m:r>
-                      <a:rPr lang="en-US" i="1">
+                      <a:rPr lang="en-US" altLang="ko-KR" i="1">
                         <a:solidFill>
                           <a:srgbClr val="000000"/>
                         </a:solidFill>
@@ -9886,7 +9926,7 @@
                       <m:t>0≤</m:t>
                     </m:r>
                     <m:r>
-                      <a:rPr lang="en-US" i="1">
+                      <a:rPr lang="ko-KR" altLang="en-US" i="1">
                         <a:solidFill>
                           <a:srgbClr val="000000"/>
                         </a:solidFill>
@@ -9895,7 +9935,7 @@
                       <m:t>𝑗</m:t>
                     </m:r>
                     <m:r>
-                      <a:rPr lang="en-US" i="1">
+                      <a:rPr lang="ko-KR" altLang="en-US" i="1">
                         <a:solidFill>
                           <a:srgbClr val="000000"/>
                         </a:solidFill>
@@ -9904,7 +9944,7 @@
                       <m:t>≤</m:t>
                     </m:r>
                     <m:r>
-                      <a:rPr lang="en-US" i="1">
+                      <a:rPr lang="ko-KR" altLang="en-US" i="1">
                         <a:solidFill>
                           <a:srgbClr val="000000"/>
                         </a:solidFill>
@@ -9913,7 +9953,7 @@
                       <m:t>𝑘</m:t>
                     </m:r>
                     <m:r>
-                      <a:rPr lang="en-US" i="1">
+                      <a:rPr lang="ko-KR" altLang="en-US" i="1">
                         <a:solidFill>
                           <a:srgbClr val="000000"/>
                         </a:solidFill>
@@ -9924,7 +9964,7 @@
                   </m:oMath>
                 </a14:m>
                 <a:r>
-                  <a:rPr sz="1800" dirty="0">
+                  <a:rPr lang="ko-KR" altLang="en-US" sz="1800" dirty="0">
                     <a:solidFill>
                       <a:srgbClr val="000000"/>
                     </a:solidFill>
@@ -9934,7 +9974,7 @@
                 <a14:m>
                   <m:oMath xmlns:m="http://schemas.openxmlformats.org/officeDocument/2006/math">
                     <m:r>
-                      <a:rPr lang="en-US" i="1">
+                      <a:rPr lang="ko-KR" altLang="en-US" i="1">
                         <a:solidFill>
                           <a:srgbClr val="000000"/>
                         </a:solidFill>
@@ -9943,7 +9983,7 @@
                       <m:t>𝐺</m:t>
                     </m:r>
                     <m:r>
-                      <a:rPr lang="en-US" i="1">
+                      <a:rPr lang="en-US" altLang="ko-KR" i="1">
                         <a:solidFill>
                           <a:srgbClr val="000000"/>
                         </a:solidFill>
@@ -9954,7 +9994,7 @@
                     <m:sSub>
                       <m:sSubPr>
                         <m:ctrlPr>
-                          <a:rPr lang="en-US" i="1">
+                          <a:rPr lang="ko-KR" altLang="en-US" i="1">
                             <a:solidFill>
                               <a:srgbClr val="000000"/>
                             </a:solidFill>
@@ -9964,7 +10004,7 @@
                       </m:sSubPr>
                       <m:e>
                         <m:r>
-                          <a:rPr lang="en-US" i="1">
+                          <a:rPr lang="ko-KR" altLang="en-US" i="1">
                             <a:solidFill>
                               <a:srgbClr val="000000"/>
                             </a:solidFill>
@@ -9975,7 +10015,7 @@
                       </m:e>
                       <m:sub>
                         <m:r>
-                          <a:rPr lang="en-US" i="1">
+                          <a:rPr lang="ko-KR" altLang="en-US" i="1">
                             <a:solidFill>
                               <a:srgbClr val="000000"/>
                             </a:solidFill>
@@ -9986,7 +10026,7 @@
                       </m:sub>
                     </m:sSub>
                     <m:r>
-                      <a:rPr lang="en-US" i="1">
+                      <a:rPr lang="en-US" altLang="ko-KR" i="1">
                         <a:solidFill>
                           <a:srgbClr val="000000"/>
                         </a:solidFill>
@@ -9998,7 +10038,7 @@
                       <m:rPr>
                         <m:nor/>
                       </m:rPr>
-                      <a:rPr lang="en-US" i="0">
+                      <a:rPr lang="ko-KR" altLang="en-US" i="0">
                         <a:solidFill>
                           <a:srgbClr val="000000"/>
                         </a:solidFill>
@@ -10009,7 +10049,7 @@
                     <m:limUpp>
                       <m:limUppPr>
                         <m:ctrlPr>
-                          <a:rPr lang="en-US" i="1">
+                          <a:rPr lang="ko-KR" altLang="en-US" i="1">
                             <a:solidFill>
                               <a:srgbClr val="000000"/>
                             </a:solidFill>
@@ -10019,7 +10059,7 @@
                       </m:limUppPr>
                       <m:e>
                         <m:r>
-                          <a:rPr lang="en-US" i="1">
+                          <a:rPr lang="en-US" altLang="ko-KR" i="1">
                             <a:solidFill>
                               <a:srgbClr val="000000"/>
                             </a:solidFill>
@@ -10030,7 +10070,7 @@
                       </m:e>
                       <m:lim>
                         <m:r>
-                          <a:rPr lang="en-US" i="1">
+                          <a:rPr lang="en-US" altLang="ko-KR" i="1">
                             <a:solidFill>
                               <a:srgbClr val="000000"/>
                             </a:solidFill>
@@ -10044,7 +10084,7 @@
                       <m:rPr>
                         <m:nor/>
                       </m:rPr>
-                      <a:rPr lang="en-US" i="0">
+                      <a:rPr lang="ko-KR" altLang="en-US" i="0">
                         <a:solidFill>
                           <a:srgbClr val="000000"/>
                         </a:solidFill>
@@ -10055,7 +10095,7 @@
                     <m:sSub>
                       <m:sSubPr>
                         <m:ctrlPr>
-                          <a:rPr lang="en-US" i="1">
+                          <a:rPr lang="ko-KR" altLang="en-US" i="1">
                             <a:solidFill>
                               <a:srgbClr val="000000"/>
                             </a:solidFill>
@@ -10065,7 +10105,7 @@
                       </m:sSubPr>
                       <m:e>
                         <m:r>
-                          <a:rPr lang="en-US" i="1">
+                          <a:rPr lang="ko-KR" altLang="en-US" i="1">
                             <a:solidFill>
                               <a:srgbClr val="000000"/>
                             </a:solidFill>
@@ -10078,7 +10118,7 @@
                         <m:sSub>
                           <m:sSubPr>
                             <m:ctrlPr>
-                              <a:rPr lang="en-US" i="1">
+                              <a:rPr lang="ko-KR" altLang="en-US" i="1">
                                 <a:solidFill>
                                   <a:srgbClr val="000000"/>
                                 </a:solidFill>
@@ -10088,7 +10128,7 @@
                           </m:sSubPr>
                           <m:e>
                             <m:r>
-                              <a:rPr lang="en-US" i="1">
+                              <a:rPr lang="en-US" altLang="ko-KR" i="1">
                                 <a:solidFill>
                                   <a:srgbClr val="000000"/>
                                 </a:solidFill>
@@ -10099,7 +10139,7 @@
                           </m:e>
                           <m:sub>
                             <m:r>
-                              <a:rPr lang="en-US" i="1">
+                              <a:rPr lang="ko-KR" altLang="en-US" i="1">
                                 <a:solidFill>
                                   <a:srgbClr val="000000"/>
                                 </a:solidFill>
@@ -10114,7 +10154,7 @@
                   </m:oMath>
                 </a14:m>
                 <a:r>
-                  <a:rPr sz="1800" dirty="0">
+                  <a:rPr lang="ko-KR" altLang="en-US" sz="1800" dirty="0">
                     <a:solidFill>
                       <a:srgbClr val="000000"/>
                     </a:solidFill>
@@ -10127,17 +10167,25 @@
                   <a:buAutoNum type="arabicPeriod"/>
                 </a:pPr>
                 <a:r>
-                  <a:rPr sz="1800" dirty="0">
+                  <a:rPr lang="ko-KR" altLang="en-US" sz="1800" dirty="0">
                     <a:solidFill>
                       <a:srgbClr val="000000"/>
                     </a:solidFill>
                   </a:rPr>
-                  <a:t>예: </a:t>
+                  <a:t>예</a:t>
+                </a:r>
+                <a:r>
+                  <a:rPr lang="en-US" altLang="ko-KR" sz="1800" dirty="0">
+                    <a:solidFill>
+                      <a:srgbClr val="000000"/>
+                    </a:solidFill>
+                  </a:rPr>
+                  <a:t>: </a:t>
                 </a:r>
                 <a14:m>
                   <m:oMath xmlns:m="http://schemas.openxmlformats.org/officeDocument/2006/math">
                     <m:r>
-                      <a:rPr lang="en-US" i="1">
+                      <a:rPr lang="en-US" altLang="ko-KR" i="1">
                         <a:solidFill>
                           <a:srgbClr val="000000"/>
                         </a:solidFill>
@@ -10146,7 +10194,7 @@
                       <m:t>h</m:t>
                     </m:r>
                     <m:r>
-                      <a:rPr lang="en-US" i="1">
+                      <a:rPr lang="en-US" altLang="ko-KR" i="1">
                         <a:solidFill>
                           <a:srgbClr val="000000"/>
                         </a:solidFill>
@@ -10157,7 +10205,7 @@
                   </m:oMath>
                 </a14:m>
                 <a:r>
-                  <a:rPr sz="1800" dirty="0">
+                  <a:rPr lang="ko-KR" altLang="en-US" sz="1800" dirty="0">
                     <a:solidFill>
                       <a:srgbClr val="000000"/>
                     </a:solidFill>
@@ -10167,7 +10215,7 @@
                 <a14:m>
                   <m:oMath xmlns:m="http://schemas.openxmlformats.org/officeDocument/2006/math">
                     <m:r>
-                      <a:rPr lang="en-US" i="1">
+                      <a:rPr lang="ko-KR" altLang="en-US" i="1">
                         <a:solidFill>
                           <a:srgbClr val="000000"/>
                         </a:solidFill>
@@ -10175,19 +10223,67 @@
                       </a:rPr>
                       <m:t>𝐺</m:t>
                     </m:r>
+                    <m:d>
+                      <m:dPr>
+                        <m:ctrlPr>
+                          <a:rPr lang="ko-KR" altLang="en-US" i="1">
+                            <a:solidFill>
+                              <a:srgbClr val="000000"/>
+                            </a:solidFill>
+                            <a:latin typeface="Cambria Math"/>
+                          </a:rPr>
+                        </m:ctrlPr>
+                      </m:dPr>
+                      <m:e>
+                        <m:sSub>
+                          <m:sSubPr>
+                            <m:ctrlPr>
+                              <a:rPr lang="ko-KR" altLang="en-US" i="1">
+                                <a:solidFill>
+                                  <a:srgbClr val="000000"/>
+                                </a:solidFill>
+                                <a:latin typeface="Cambria Math" panose="02040503050406030204" pitchFamily="18" charset="0"/>
+                              </a:rPr>
+                            </m:ctrlPr>
+                          </m:sSubPr>
+                          <m:e>
+                            <m:r>
+                              <a:rPr lang="ko-KR" altLang="en-US" i="1">
+                                <a:solidFill>
+                                  <a:srgbClr val="000000"/>
+                                </a:solidFill>
+                                <a:latin typeface="Cambria Math"/>
+                              </a:rPr>
+                              <m:t>𝑠</m:t>
+                            </m:r>
+                          </m:e>
+                          <m:sub>
+                            <m:r>
+                              <a:rPr lang="en-US" altLang="ko-KR" i="1">
+                                <a:solidFill>
+                                  <a:srgbClr val="000000"/>
+                                </a:solidFill>
+                                <a:latin typeface="Cambria Math"/>
+                              </a:rPr>
+                              <m:t>0</m:t>
+                            </m:r>
+                          </m:sub>
+                        </m:sSub>
+                      </m:e>
+                    </m:d>
                     <m:r>
-                      <a:rPr lang="en-US" i="1">
+                      <a:rPr lang="en-US" altLang="ko-KR" i="1">
                         <a:solidFill>
                           <a:srgbClr val="000000"/>
                         </a:solidFill>
                         <a:latin typeface="Cambria Math"/>
                       </a:rPr>
-                      <m:t>(</m:t>
+                      <m:t>=</m:t>
                     </m:r>
                     <m:sSub>
                       <m:sSubPr>
                         <m:ctrlPr>
-                          <a:rPr lang="en-US" i="1">
+                          <a:rPr lang="ko-KR" altLang="en-US" i="1">
                             <a:solidFill>
                               <a:srgbClr val="000000"/>
                             </a:solidFill>
@@ -10197,50 +10293,7 @@
                       </m:sSubPr>
                       <m:e>
                         <m:r>
-                          <a:rPr lang="en-US" i="1">
-                            <a:solidFill>
-                              <a:srgbClr val="000000"/>
-                            </a:solidFill>
-                            <a:latin typeface="Cambria Math"/>
-                          </a:rPr>
-                          <m:t>𝑠</m:t>
-                        </m:r>
-                      </m:e>
-                      <m:sub>
-                        <m:r>
-                          <a:rPr lang="en-US" i="1">
-                            <a:solidFill>
-                              <a:srgbClr val="000000"/>
-                            </a:solidFill>
-                            <a:latin typeface="Cambria Math"/>
-                          </a:rPr>
-                          <m:t>0</m:t>
-                        </m:r>
-                      </m:sub>
-                    </m:sSub>
-                    <m:r>
-                      <a:rPr lang="en-US" i="1">
-                        <a:solidFill>
-                          <a:srgbClr val="000000"/>
-                        </a:solidFill>
-                        <a:latin typeface="Cambria Math"/>
-                      </a:rPr>
-                      <m:t>)=</m:t>
-                    </m:r>
-                    <m:sSub>
-                      <m:sSubPr>
-                        <m:ctrlPr>
-                          <a:rPr lang="en-US" i="1">
-                            <a:solidFill>
-                              <a:srgbClr val="000000"/>
-                            </a:solidFill>
-                            <a:latin typeface="Cambria Math" panose="02040503050406030204" pitchFamily="18" charset="0"/>
-                          </a:rPr>
-                        </m:ctrlPr>
-                      </m:sSubPr>
-                      <m:e>
-                        <m:r>
-                          <a:rPr lang="en-US" i="1">
+                          <a:rPr lang="ko-KR" altLang="en-US" i="1">
                             <a:solidFill>
                               <a:srgbClr val="000000"/>
                             </a:solidFill>
@@ -10251,7 +10304,7 @@
                       </m:e>
                       <m:sub>
                         <m:r>
-                          <a:rPr lang="en-US" i="1">
+                          <a:rPr lang="en-US" altLang="ko-KR" i="1">
                             <a:solidFill>
                               <a:srgbClr val="000000"/>
                             </a:solidFill>
@@ -10262,7 +10315,7 @@
                       </m:sub>
                     </m:sSub>
                     <m:r>
-                      <a:rPr lang="en-US" i="1">
+                      <a:rPr lang="en-US" altLang="ko-KR" i="1">
                         <a:solidFill>
                           <a:srgbClr val="000000"/>
                         </a:solidFill>
@@ -10274,7 +10327,7 @@
                       <m:rPr>
                         <m:nor/>
                       </m:rPr>
-                      <a:rPr lang="en-US" i="0">
+                      <a:rPr lang="ko-KR" altLang="en-US" i="0">
                         <a:solidFill>
                           <a:srgbClr val="000000"/>
                         </a:solidFill>
@@ -10283,7 +10336,7 @@
                       <m:t> </m:t>
                     </m:r>
                     <m:r>
-                      <a:rPr lang="en-US" i="1">
+                      <a:rPr lang="ko-KR" altLang="en-US" i="1">
                         <a:solidFill>
                           <a:srgbClr val="000000"/>
                         </a:solidFill>
@@ -10291,19 +10344,79 @@
                       </a:rPr>
                       <m:t>𝐺</m:t>
                     </m:r>
+                    <m:d>
+                      <m:dPr>
+                        <m:ctrlPr>
+                          <a:rPr lang="ko-KR" altLang="en-US" i="1">
+                            <a:solidFill>
+                              <a:srgbClr val="000000"/>
+                            </a:solidFill>
+                            <a:latin typeface="Cambria Math"/>
+                          </a:rPr>
+                        </m:ctrlPr>
+                      </m:dPr>
+                      <m:e>
+                        <m:sSub>
+                          <m:sSubPr>
+                            <m:ctrlPr>
+                              <a:rPr lang="ko-KR" altLang="en-US" i="1">
+                                <a:solidFill>
+                                  <a:srgbClr val="000000"/>
+                                </a:solidFill>
+                                <a:latin typeface="Cambria Math" panose="02040503050406030204" pitchFamily="18" charset="0"/>
+                              </a:rPr>
+                            </m:ctrlPr>
+                          </m:sSubPr>
+                          <m:e>
+                            <m:r>
+                              <a:rPr lang="ko-KR" altLang="en-US" i="1">
+                                <a:solidFill>
+                                  <a:srgbClr val="000000"/>
+                                </a:solidFill>
+                                <a:latin typeface="Cambria Math"/>
+                              </a:rPr>
+                              <m:t>𝑠</m:t>
+                            </m:r>
+                          </m:e>
+                          <m:sub>
+                            <m:r>
+                              <a:rPr lang="en-US" altLang="ko-KR" i="1">
+                                <a:solidFill>
+                                  <a:srgbClr val="000000"/>
+                                </a:solidFill>
+                                <a:latin typeface="Cambria Math"/>
+                              </a:rPr>
+                              <m:t>1</m:t>
+                            </m:r>
+                          </m:sub>
+                        </m:sSub>
+                      </m:e>
+                    </m:d>
+                  </m:oMath>
+                </a14:m>
+                <a:br>
+                  <a:rPr lang="ko-KR" altLang="en-US" i="1" dirty="0">
+                    <a:solidFill>
+                      <a:srgbClr val="000000"/>
+                    </a:solidFill>
+                    <a:latin typeface="Cambria Math"/>
+                  </a:rPr>
+                </a:br>
+                <a14:m>
+                  <m:oMath xmlns:m="http://schemas.openxmlformats.org/officeDocument/2006/math">
                     <m:r>
-                      <a:rPr lang="en-US" i="1">
+                      <a:rPr lang="en-US" altLang="ko-KR" i="1">
                         <a:solidFill>
                           <a:srgbClr val="000000"/>
                         </a:solidFill>
                         <a:latin typeface="Cambria Math"/>
                       </a:rPr>
-                      <m:t>(</m:t>
+                      <m:t>=</m:t>
                     </m:r>
                     <m:sSub>
                       <m:sSubPr>
                         <m:ctrlPr>
-                          <a:rPr lang="en-US" i="1">
+                          <a:rPr lang="ko-KR" altLang="en-US" i="1">
                             <a:solidFill>
                               <a:srgbClr val="000000"/>
                             </a:solidFill>
@@ -10313,50 +10426,7 @@
                       </m:sSubPr>
                       <m:e>
                         <m:r>
-                          <a:rPr lang="en-US" i="1">
-                            <a:solidFill>
-                              <a:srgbClr val="000000"/>
-                            </a:solidFill>
-                            <a:latin typeface="Cambria Math"/>
-                          </a:rPr>
-                          <m:t>𝑠</m:t>
-                        </m:r>
-                      </m:e>
-                      <m:sub>
-                        <m:r>
-                          <a:rPr lang="en-US" i="1">
-                            <a:solidFill>
-                              <a:srgbClr val="000000"/>
-                            </a:solidFill>
-                            <a:latin typeface="Cambria Math"/>
-                          </a:rPr>
-                          <m:t>1</m:t>
-                        </m:r>
-                      </m:sub>
-                    </m:sSub>
-                    <m:r>
-                      <a:rPr lang="en-US" i="1">
-                        <a:solidFill>
-                          <a:srgbClr val="000000"/>
-                        </a:solidFill>
-                        <a:latin typeface="Cambria Math"/>
-                      </a:rPr>
-                      <m:t>)=</m:t>
-                    </m:r>
-                    <m:sSub>
-                      <m:sSubPr>
-                        <m:ctrlPr>
-                          <a:rPr lang="en-US" i="1">
-                            <a:solidFill>
-                              <a:srgbClr val="000000"/>
-                            </a:solidFill>
-                            <a:latin typeface="Cambria Math" panose="02040503050406030204" pitchFamily="18" charset="0"/>
-                          </a:rPr>
-                        </m:ctrlPr>
-                      </m:sSubPr>
-                      <m:e>
-                        <m:r>
-                          <a:rPr lang="en-US" i="1">
+                          <a:rPr lang="ko-KR" altLang="en-US" i="1">
                             <a:solidFill>
                               <a:srgbClr val="000000"/>
                             </a:solidFill>
@@ -10367,7 +10437,7 @@
                       </m:e>
                       <m:sub>
                         <m:r>
-                          <a:rPr lang="en-US" i="1">
+                          <a:rPr lang="en-US" altLang="ko-KR" i="1">
                             <a:solidFill>
                               <a:srgbClr val="000000"/>
                             </a:solidFill>
@@ -10378,7 +10448,7 @@
                       </m:sub>
                     </m:sSub>
                     <m:r>
-                      <a:rPr lang="en-US" i="1">
+                      <a:rPr lang="en-US" altLang="ko-KR" i="1">
                         <a:solidFill>
                           <a:srgbClr val="000000"/>
                         </a:solidFill>
@@ -10390,7 +10460,7 @@
                       <m:rPr>
                         <m:nor/>
                       </m:rPr>
-                      <a:rPr lang="en-US" i="0">
+                      <a:rPr lang="ko-KR" altLang="en-US" i="0">
                         <a:solidFill>
                           <a:srgbClr val="000000"/>
                         </a:solidFill>
@@ -10399,7 +10469,7 @@
                       <m:t> </m:t>
                     </m:r>
                     <m:r>
-                      <a:rPr lang="en-US" i="1">
+                      <a:rPr lang="ko-KR" altLang="en-US" i="1">
                         <a:solidFill>
                           <a:srgbClr val="000000"/>
                         </a:solidFill>
@@ -10408,7 +10478,7 @@
                       <m:t>𝐺</m:t>
                     </m:r>
                     <m:r>
-                      <a:rPr lang="en-US" i="1">
+                      <a:rPr lang="en-US" altLang="ko-KR" i="1">
                         <a:solidFill>
                           <a:srgbClr val="000000"/>
                         </a:solidFill>
@@ -10419,7 +10489,7 @@
                     <m:sSub>
                       <m:sSubPr>
                         <m:ctrlPr>
-                          <a:rPr lang="en-US" i="1">
+                          <a:rPr lang="ko-KR" altLang="en-US" i="1">
                             <a:solidFill>
                               <a:srgbClr val="000000"/>
                             </a:solidFill>
@@ -10429,7 +10499,7 @@
                       </m:sSubPr>
                       <m:e>
                         <m:r>
-                          <a:rPr lang="en-US" i="1">
+                          <a:rPr lang="ko-KR" altLang="en-US" i="1">
                             <a:solidFill>
                               <a:srgbClr val="000000"/>
                             </a:solidFill>
@@ -10440,7 +10510,7 @@
                       </m:e>
                       <m:sub>
                         <m:r>
-                          <a:rPr lang="en-US" i="1">
+                          <a:rPr lang="en-US" altLang="ko-KR" i="1">
                             <a:solidFill>
                               <a:srgbClr val="000000"/>
                             </a:solidFill>
@@ -10451,7 +10521,7 @@
                       </m:sub>
                     </m:sSub>
                     <m:r>
-                      <a:rPr lang="en-US" i="1">
+                      <a:rPr lang="en-US" altLang="ko-KR" i="1">
                         <a:solidFill>
                           <a:srgbClr val="000000"/>
                         </a:solidFill>
@@ -10462,7 +10532,7 @@
                     <m:sSub>
                       <m:sSubPr>
                         <m:ctrlPr>
-                          <a:rPr lang="en-US" i="1">
+                          <a:rPr lang="ko-KR" altLang="en-US" i="1">
                             <a:solidFill>
                               <a:srgbClr val="000000"/>
                             </a:solidFill>
@@ -10472,7 +10542,7 @@
                       </m:sSubPr>
                       <m:e>
                         <m:r>
-                          <a:rPr lang="en-US" i="1">
+                          <a:rPr lang="ko-KR" altLang="en-US" i="1">
                             <a:solidFill>
                               <a:srgbClr val="000000"/>
                             </a:solidFill>
@@ -10483,7 +10553,7 @@
                       </m:e>
                       <m:sub>
                         <m:r>
-                          <a:rPr lang="en-US" i="1">
+                          <a:rPr lang="en-US" altLang="ko-KR" i="1">
                             <a:solidFill>
                               <a:srgbClr val="000000"/>
                             </a:solidFill>
@@ -10496,13 +10566,18 @@
                   </m:oMath>
                 </a14:m>
                 <a:r>
-                  <a:rPr sz="1800" dirty="0">
+                  <a:rPr lang="ko-KR" altLang="en-US" sz="1800" dirty="0">
                     <a:solidFill>
                       <a:srgbClr val="000000"/>
                     </a:solidFill>
                   </a:rPr>
                   <a:t>을 확인한다</a:t>
                 </a:r>
+                <a:endParaRPr sz="1800" dirty="0">
+                  <a:solidFill>
+                    <a:srgbClr val="000000"/>
+                  </a:solidFill>
+                </a:endParaRPr>
               </a:p>
             </p:txBody>
           </p:sp>
@@ -10639,8 +10714,8 @@
           </a:p>
         </p:txBody>
       </p:sp>
-      <mc:AlternateContent xmlns:mc="http://schemas.openxmlformats.org/markup-compatibility/2006">
-        <mc:Choice xmlns:a14="http://schemas.microsoft.com/office/drawing/2010/main" Requires="a14">
+      <mc:AlternateContent xmlns:mc="http://schemas.openxmlformats.org/markup-compatibility/2006" xmlns:a14="http://schemas.microsoft.com/office/drawing/2010/main">
+        <mc:Choice Requires="a14">
           <p:sp>
             <p:nvSpPr>
               <p:cNvPr id="3" name="Content Placeholder 2"/>
@@ -10705,7 +10780,7 @@
                     <m:sSub>
                       <m:sSubPr>
                         <m:ctrlPr>
-                          <a:rPr lang="en-US">
+                          <a:rPr lang="en-US" i="1">
                             <a:solidFill>
                               <a:srgbClr val="000000"/>
                             </a:solidFill>
@@ -10751,7 +10826,7 @@
                     <m:sSub>
                       <m:sSubPr>
                         <m:ctrlPr>
-                          <a:rPr lang="en-US">
+                          <a:rPr lang="en-US" i="1">
                             <a:solidFill>
                               <a:srgbClr val="000000"/>
                             </a:solidFill>
@@ -11056,7 +11131,7 @@
             </p:txBody>
           </p:sp>
         </mc:Choice>
-        <mc:Fallback>
+        <mc:Fallback xmlns="">
           <p:sp>
             <p:nvSpPr>
               <p:cNvPr id="3" name="Content Placeholder 2"/>
@@ -11164,8 +11239,8 @@
           </a:p>
         </p:txBody>
       </p:sp>
-      <mc:AlternateContent xmlns:mc="http://schemas.openxmlformats.org/markup-compatibility/2006">
-        <mc:Choice xmlns:a14="http://schemas.microsoft.com/office/drawing/2010/main" Requires="a14">
+      <mc:AlternateContent xmlns:mc="http://schemas.openxmlformats.org/markup-compatibility/2006" xmlns:a14="http://schemas.microsoft.com/office/drawing/2010/main">
+        <mc:Choice Requires="a14">
           <p:sp>
             <p:nvSpPr>
               <p:cNvPr id="3" name="Content Placeholder 2"/>
@@ -11384,7 +11459,7 @@
                       <m:f>
                         <m:fPr>
                           <m:ctrlPr>
-                            <a:rPr lang="en-US">
+                            <a:rPr lang="en-US" i="1">
                               <a:solidFill>
                                 <a:srgbClr val="000000"/>
                               </a:solidFill>
@@ -11573,7 +11648,7 @@
                       <m:sSup>
                         <m:sSupPr>
                           <m:ctrlPr>
-                            <a:rPr lang="en-US">
+                            <a:rPr lang="en-US" i="1">
                               <a:solidFill>
                                 <a:srgbClr val="000000"/>
                               </a:solidFill>
@@ -11585,7 +11660,7 @@
                           <m:d>
                             <m:dPr>
                               <m:ctrlPr>
-                                <a:rPr lang="en-US">
+                                <a:rPr lang="en-US" i="1">
                                   <a:solidFill>
                                     <a:srgbClr val="000000"/>
                                   </a:solidFill>
@@ -11597,7 +11672,7 @@
                               <m:f>
                                 <m:fPr>
                                   <m:ctrlPr>
-                                    <a:rPr lang="en-US">
+                                    <a:rPr lang="en-US" i="1">
                                       <a:solidFill>
                                         <a:srgbClr val="000000"/>
                                       </a:solidFill>
@@ -12009,7 +12084,7 @@
                     <m:sSup>
                       <m:sSupPr>
                         <m:ctrlPr>
-                          <a:rPr lang="en-US">
+                          <a:rPr lang="en-US" i="1">
                             <a:solidFill>
                               <a:srgbClr val="000000"/>
                             </a:solidFill>
@@ -12182,7 +12257,7 @@
             </p:txBody>
           </p:sp>
         </mc:Choice>
-        <mc:Fallback>
+        <mc:Fallback xmlns="">
           <p:sp>
             <p:nvSpPr>
               <p:cNvPr id="3" name="Content Placeholder 2"/>
@@ -13244,8 +13319,8 @@
           </a:p>
         </p:txBody>
       </p:sp>
-      <mc:AlternateContent xmlns:mc="http://schemas.openxmlformats.org/markup-compatibility/2006">
-        <mc:Choice xmlns:a14="http://schemas.microsoft.com/office/drawing/2010/main" Requires="a14">
+      <mc:AlternateContent xmlns:mc="http://schemas.openxmlformats.org/markup-compatibility/2006" xmlns:a14="http://schemas.microsoft.com/office/drawing/2010/main">
+        <mc:Choice Requires="a14">
           <p:sp>
             <p:nvSpPr>
               <p:cNvPr id="3" name="Content Placeholder 2"/>
@@ -13279,7 +13354,7 @@
                     <m:sSub>
                       <m:sSubPr>
                         <m:ctrlPr>
-                          <a:rPr lang="en-US">
+                          <a:rPr lang="en-US" i="1">
                             <a:solidFill>
                               <a:srgbClr val="000000"/>
                             </a:solidFill>
@@ -13481,7 +13556,7 @@
             </p:txBody>
           </p:sp>
         </mc:Choice>
-        <mc:Fallback>
+        <mc:Fallback xmlns="">
           <p:sp>
             <p:nvSpPr>
               <p:cNvPr id="3" name="Content Placeholder 2"/>
@@ -14362,8 +14437,8 @@
           </a:p>
         </p:txBody>
       </p:sp>
-      <mc:AlternateContent xmlns:mc="http://schemas.openxmlformats.org/markup-compatibility/2006">
-        <mc:Choice xmlns:a14="http://schemas.microsoft.com/office/drawing/2010/main" Requires="a14">
+      <mc:AlternateContent xmlns:mc="http://schemas.openxmlformats.org/markup-compatibility/2006" xmlns:a14="http://schemas.microsoft.com/office/drawing/2010/main">
+        <mc:Choice Requires="a14">
           <p:sp>
             <p:nvSpPr>
               <p:cNvPr id="3" name="Content Placeholder 2"/>
@@ -14747,7 +14822,7 @@
                     <m:f>
                       <m:fPr>
                         <m:ctrlPr>
-                          <a:rPr lang="en-US">
+                          <a:rPr lang="en-US" i="1">
                             <a:solidFill>
                               <a:srgbClr val="000000"/>
                             </a:solidFill>
@@ -14759,7 +14834,7 @@
                         <m:sSup>
                           <m:sSupPr>
                             <m:ctrlPr>
-                              <a:rPr lang="en-US">
+                              <a:rPr lang="en-US" i="1">
                                 <a:solidFill>
                                   <a:srgbClr val="000000"/>
                                 </a:solidFill>
@@ -14936,7 +15011,7 @@
             </p:txBody>
           </p:sp>
         </mc:Choice>
-        <mc:Fallback>
+        <mc:Fallback xmlns="">
           <p:sp>
             <p:nvSpPr>
               <p:cNvPr id="3" name="Content Placeholder 2"/>
@@ -15044,8 +15119,8 @@
           </a:p>
         </p:txBody>
       </p:sp>
-      <mc:AlternateContent xmlns:mc="http://schemas.openxmlformats.org/markup-compatibility/2006">
-        <mc:Choice xmlns:a14="http://schemas.microsoft.com/office/drawing/2010/main" Requires="a14">
+      <mc:AlternateContent xmlns:mc="http://schemas.openxmlformats.org/markup-compatibility/2006" xmlns:a14="http://schemas.microsoft.com/office/drawing/2010/main">
+        <mc:Choice Requires="a14">
           <p:sp>
             <p:nvSpPr>
               <p:cNvPr id="3" name="Content Placeholder 2"/>
@@ -15100,7 +15175,7 @@
                     <m:sSup>
                       <m:sSupPr>
                         <m:ctrlPr>
-                          <a:rPr lang="en-US">
+                          <a:rPr lang="en-US" i="1">
                             <a:solidFill>
                               <a:srgbClr val="000000"/>
                             </a:solidFill>
@@ -15225,7 +15300,7 @@
                     <m:d>
                       <m:dPr>
                         <m:ctrlPr>
-                          <a:rPr lang="en-US">
+                          <a:rPr lang="en-US" i="1">
                             <a:solidFill>
                               <a:srgbClr val="000000"/>
                             </a:solidFill>
@@ -15238,7 +15313,7 @@
                           <m:fPr>
                             <m:type m:val="noBar"/>
                             <m:ctrlPr>
-                              <a:rPr lang="en-US">
+                              <a:rPr lang="en-US" i="1">
                                 <a:solidFill>
                                   <a:srgbClr val="000000"/>
                                 </a:solidFill>
@@ -15699,7 +15774,7 @@
                     <m:d>
                       <m:dPr>
                         <m:ctrlPr>
-                          <a:rPr lang="en-US">
+                          <a:rPr lang="en-US" i="1">
                             <a:solidFill>
                               <a:srgbClr val="000000"/>
                             </a:solidFill>
@@ -15712,7 +15787,7 @@
                           <m:fPr>
                             <m:type m:val="noBar"/>
                             <m:ctrlPr>
-                              <a:rPr lang="en-US">
+                              <a:rPr lang="en-US" i="1">
                                 <a:solidFill>
                                   <a:srgbClr val="000000"/>
                                 </a:solidFill>
@@ -15862,7 +15937,7 @@
                     <m:d>
                       <m:dPr>
                         <m:ctrlPr>
-                          <a:rPr lang="en-US">
+                          <a:rPr lang="en-US" i="1">
                             <a:solidFill>
                               <a:srgbClr val="000000"/>
                             </a:solidFill>
@@ -15875,7 +15950,7 @@
                           <m:fPr>
                             <m:type m:val="noBar"/>
                             <m:ctrlPr>
-                              <a:rPr lang="en-US">
+                              <a:rPr lang="en-US" i="1">
                                 <a:solidFill>
                                   <a:srgbClr val="000000"/>
                                 </a:solidFill>
@@ -15924,7 +15999,7 @@
                       <m:fPr>
                         <m:type m:val="lin"/>
                         <m:ctrlPr>
-                          <a:rPr lang="en-US">
+                          <a:rPr lang="en-US" i="1">
                             <a:solidFill>
                               <a:srgbClr val="000000"/>
                             </a:solidFill>
@@ -15969,7 +16044,7 @@
             </p:txBody>
           </p:sp>
         </mc:Choice>
-        <mc:Fallback>
+        <mc:Fallback xmlns="">
           <p:sp>
             <p:nvSpPr>
               <p:cNvPr id="3" name="Content Placeholder 2"/>
@@ -16077,8 +16152,8 @@
           </a:p>
         </p:txBody>
       </p:sp>
-      <mc:AlternateContent xmlns:mc="http://schemas.openxmlformats.org/markup-compatibility/2006">
-        <mc:Choice xmlns:a14="http://schemas.microsoft.com/office/drawing/2010/main" Requires="a14">
+      <mc:AlternateContent xmlns:mc="http://schemas.openxmlformats.org/markup-compatibility/2006" xmlns:a14="http://schemas.microsoft.com/office/drawing/2010/main">
+        <mc:Choice Requires="a14">
           <p:sp>
             <p:nvSpPr>
               <p:cNvPr id="3" name="Content Placeholder 2"/>
@@ -16692,7 +16767,7 @@
             </p:txBody>
           </p:sp>
         </mc:Choice>
-        <mc:Fallback>
+        <mc:Fallback xmlns="">
           <p:sp>
             <p:nvSpPr>
               <p:cNvPr id="3" name="Content Placeholder 2"/>
@@ -17971,8 +18046,8 @@
           </a:p>
         </p:txBody>
       </p:sp>
-      <mc:AlternateContent xmlns:mc="http://schemas.openxmlformats.org/markup-compatibility/2006">
-        <mc:Choice xmlns:a14="http://schemas.microsoft.com/office/drawing/2010/main" Requires="a14">
+      <mc:AlternateContent xmlns:mc="http://schemas.openxmlformats.org/markup-compatibility/2006" xmlns:a14="http://schemas.microsoft.com/office/drawing/2010/main">
+        <mc:Choice Requires="a14">
           <p:sp>
             <p:nvSpPr>
               <p:cNvPr id="3" name="Content Placeholder 2"/>
@@ -18180,7 +18255,7 @@
             </p:txBody>
           </p:sp>
         </mc:Choice>
-        <mc:Fallback>
+        <mc:Fallback xmlns="">
           <p:sp>
             <p:nvSpPr>
               <p:cNvPr id="3" name="Content Placeholder 2"/>
@@ -18312,8 +18387,8 @@
           </a:p>
         </p:txBody>
       </p:sp>
-      <mc:AlternateContent xmlns:mc="http://schemas.openxmlformats.org/markup-compatibility/2006">
-        <mc:Choice xmlns:a14="http://schemas.microsoft.com/office/drawing/2010/main" Requires="a14">
+      <mc:AlternateContent xmlns:mc="http://schemas.openxmlformats.org/markup-compatibility/2006" xmlns:a14="http://schemas.microsoft.com/office/drawing/2010/main">
+        <mc:Choice Requires="a14">
           <p:sp>
             <p:nvSpPr>
               <p:cNvPr id="3" name="Content Placeholder 2"/>
@@ -18420,7 +18495,7 @@
             </p:txBody>
           </p:sp>
         </mc:Choice>
-        <mc:Fallback>
+        <mc:Fallback xmlns="">
           <p:sp>
             <p:nvSpPr>
               <p:cNvPr id="3" name="Content Placeholder 2"/>
@@ -19497,8 +19572,8 @@
           </a:p>
         </p:txBody>
       </p:sp>
-      <mc:AlternateContent xmlns:mc="http://schemas.openxmlformats.org/markup-compatibility/2006">
-        <mc:Choice xmlns:a14="http://schemas.microsoft.com/office/drawing/2010/main" Requires="a14">
+      <mc:AlternateContent xmlns:mc="http://schemas.openxmlformats.org/markup-compatibility/2006" xmlns:a14="http://schemas.microsoft.com/office/drawing/2010/main">
+        <mc:Choice Requires="a14">
           <p:sp>
             <p:nvSpPr>
               <p:cNvPr id="3" name="Content Placeholder 2"/>
@@ -19552,7 +19627,7 @@
                     <m:sSub>
                       <m:sSubPr>
                         <m:ctrlPr>
-                          <a:rPr lang="en-US">
+                          <a:rPr lang="en-US" i="1">
                             <a:solidFill>
                               <a:srgbClr val="000000"/>
                             </a:solidFill>
@@ -19598,7 +19673,7 @@
                     <m:sSub>
                       <m:sSubPr>
                         <m:ctrlPr>
-                          <a:rPr lang="en-US">
+                          <a:rPr lang="en-US" i="1">
                             <a:solidFill>
                               <a:srgbClr val="000000"/>
                             </a:solidFill>
@@ -19653,7 +19728,7 @@
             </p:txBody>
           </p:sp>
         </mc:Choice>
-        <mc:Fallback>
+        <mc:Fallback xmlns="">
           <p:sp>
             <p:nvSpPr>
               <p:cNvPr id="3" name="Content Placeholder 2"/>
@@ -19785,8 +19860,8 @@
           </a:p>
         </p:txBody>
       </p:sp>
-      <mc:AlternateContent xmlns:mc="http://schemas.openxmlformats.org/markup-compatibility/2006">
-        <mc:Choice xmlns:a14="http://schemas.microsoft.com/office/drawing/2010/main" Requires="a14">
+      <mc:AlternateContent xmlns:mc="http://schemas.openxmlformats.org/markup-compatibility/2006" xmlns:a14="http://schemas.microsoft.com/office/drawing/2010/main">
+        <mc:Choice Requires="a14">
           <p:sp>
             <p:nvSpPr>
               <p:cNvPr id="3" name="Content Placeholder 2"/>
@@ -19823,7 +19898,7 @@
                     <m:sSub>
                       <m:sSubPr>
                         <m:ctrlPr>
-                          <a:rPr lang="en-US">
+                          <a:rPr lang="en-US" i="1">
                             <a:solidFill>
                               <a:srgbClr val="000000"/>
                             </a:solidFill>
@@ -19919,7 +19994,7 @@
                     <m:sSub>
                       <m:sSubPr>
                         <m:ctrlPr>
-                          <a:rPr lang="en-US">
+                          <a:rPr lang="en-US" i="1">
                             <a:solidFill>
                               <a:srgbClr val="000000"/>
                             </a:solidFill>
@@ -19981,7 +20056,7 @@
                     <m:sSub>
                       <m:sSubPr>
                         <m:ctrlPr>
-                          <a:rPr lang="en-US">
+                          <a:rPr lang="en-US" i="1">
                             <a:solidFill>
                               <a:srgbClr val="000000"/>
                             </a:solidFill>
@@ -20040,7 +20115,7 @@
                     <m:sSub>
                       <m:sSubPr>
                         <m:ctrlPr>
-                          <a:rPr lang="en-US">
+                          <a:rPr lang="en-US" i="1">
                             <a:solidFill>
                               <a:srgbClr val="000000"/>
                             </a:solidFill>
@@ -20095,7 +20170,7 @@
                     <m:sSub>
                       <m:sSubPr>
                         <m:ctrlPr>
-                          <a:rPr lang="en-US">
+                          <a:rPr lang="en-US" i="1">
                             <a:solidFill>
                               <a:srgbClr val="000000"/>
                             </a:solidFill>
@@ -20141,7 +20216,7 @@
                     <m:sSub>
                       <m:sSubPr>
                         <m:ctrlPr>
-                          <a:rPr lang="en-US">
+                          <a:rPr lang="en-US" i="1">
                             <a:solidFill>
                               <a:srgbClr val="000000"/>
                             </a:solidFill>
@@ -20196,7 +20271,7 @@
                     <m:sSub>
                       <m:sSubPr>
                         <m:ctrlPr>
-                          <a:rPr lang="en-US">
+                          <a:rPr lang="en-US" i="1">
                             <a:solidFill>
                               <a:srgbClr val="000000"/>
                             </a:solidFill>
@@ -20298,7 +20373,7 @@
                     <m:sSub>
                       <m:sSubPr>
                         <m:ctrlPr>
-                          <a:rPr lang="en-US">
+                          <a:rPr lang="en-US" i="1">
                             <a:solidFill>
                               <a:srgbClr val="000000"/>
                             </a:solidFill>
@@ -20387,7 +20462,7 @@
                     <m:sSub>
                       <m:sSubPr>
                         <m:ctrlPr>
-                          <a:rPr lang="en-US">
+                          <a:rPr lang="en-US" i="1">
                             <a:solidFill>
                               <a:srgbClr val="000000"/>
                             </a:solidFill>
@@ -20472,7 +20547,7 @@
             </p:txBody>
           </p:sp>
         </mc:Choice>
-        <mc:Fallback>
+        <mc:Fallback xmlns="">
           <p:sp>
             <p:nvSpPr>
               <p:cNvPr id="3" name="Content Placeholder 2"/>
@@ -20604,8 +20679,8 @@
           </a:p>
         </p:txBody>
       </p:sp>
-      <mc:AlternateContent xmlns:mc="http://schemas.openxmlformats.org/markup-compatibility/2006">
-        <mc:Choice xmlns:a14="http://schemas.microsoft.com/office/drawing/2010/main" Requires="a14">
+      <mc:AlternateContent xmlns:mc="http://schemas.openxmlformats.org/markup-compatibility/2006" xmlns:a14="http://schemas.microsoft.com/office/drawing/2010/main">
+        <mc:Choice Requires="a14">
           <p:sp>
             <p:nvSpPr>
               <p:cNvPr id="3" name="Content Placeholder 2"/>
@@ -20663,7 +20738,7 @@
                     <m:sSub>
                       <m:sSubPr>
                         <m:ctrlPr>
-                          <a:rPr lang="en-US">
+                          <a:rPr lang="en-US" i="1">
                             <a:solidFill>
                               <a:srgbClr val="000000"/>
                             </a:solidFill>
@@ -20709,7 +20784,7 @@
                     <m:sSub>
                       <m:sSubPr>
                         <m:ctrlPr>
-                          <a:rPr lang="en-US">
+                          <a:rPr lang="en-US" i="1">
                             <a:solidFill>
                               <a:srgbClr val="000000"/>
                             </a:solidFill>
@@ -20776,7 +20851,7 @@
                     <m:sSub>
                       <m:sSubPr>
                         <m:ctrlPr>
-                          <a:rPr lang="en-US">
+                          <a:rPr lang="en-US" i="1">
                             <a:solidFill>
                               <a:srgbClr val="000000"/>
                             </a:solidFill>
@@ -20835,7 +20910,7 @@
                     <m:sSub>
                       <m:sSubPr>
                         <m:ctrlPr>
-                          <a:rPr lang="en-US">
+                          <a:rPr lang="en-US" i="1">
                             <a:solidFill>
                               <a:srgbClr val="000000"/>
                             </a:solidFill>
@@ -20881,7 +20956,7 @@
                     <m:sSub>
                       <m:sSubPr>
                         <m:ctrlPr>
-                          <a:rPr lang="en-US">
+                          <a:rPr lang="en-US" i="1">
                             <a:solidFill>
                               <a:srgbClr val="000000"/>
                             </a:solidFill>
@@ -20927,7 +21002,7 @@
                     <m:sSub>
                       <m:sSubPr>
                         <m:ctrlPr>
-                          <a:rPr lang="en-US">
+                          <a:rPr lang="en-US" i="1">
                             <a:solidFill>
                               <a:srgbClr val="000000"/>
                             </a:solidFill>
@@ -20973,7 +21048,7 @@
                     <m:sSub>
                       <m:sSubPr>
                         <m:ctrlPr>
-                          <a:rPr lang="en-US">
+                          <a:rPr lang="en-US" i="1">
                             <a:solidFill>
                               <a:srgbClr val="000000"/>
                             </a:solidFill>
@@ -21019,7 +21094,7 @@
                     <m:sSub>
                       <m:sSubPr>
                         <m:ctrlPr>
-                          <a:rPr lang="en-US">
+                          <a:rPr lang="en-US" i="1">
                             <a:solidFill>
                               <a:srgbClr val="000000"/>
                             </a:solidFill>
@@ -21099,7 +21174,7 @@
                     <m:sSub>
                       <m:sSubPr>
                         <m:ctrlPr>
-                          <a:rPr lang="en-US">
+                          <a:rPr lang="en-US" i="1">
                             <a:solidFill>
                               <a:srgbClr val="000000"/>
                             </a:solidFill>
@@ -21158,7 +21233,7 @@
                     <m:sSub>
                       <m:sSubPr>
                         <m:ctrlPr>
-                          <a:rPr lang="en-US">
+                          <a:rPr lang="en-US" i="1">
                             <a:solidFill>
                               <a:srgbClr val="000000"/>
                             </a:solidFill>
@@ -21234,7 +21309,7 @@
             </p:txBody>
           </p:sp>
         </mc:Choice>
-        <mc:Fallback>
+        <mc:Fallback xmlns="">
           <p:sp>
             <p:nvSpPr>
               <p:cNvPr id="3" name="Content Placeholder 2"/>
@@ -25796,8 +25871,8 @@
           </a:p>
         </p:txBody>
       </p:sp>
-      <mc:AlternateContent xmlns:mc="http://schemas.openxmlformats.org/markup-compatibility/2006">
-        <mc:Choice xmlns:a14="http://schemas.microsoft.com/office/drawing/2010/main" Requires="a14">
+      <mc:AlternateContent xmlns:mc="http://schemas.openxmlformats.org/markup-compatibility/2006" xmlns:a14="http://schemas.microsoft.com/office/drawing/2010/main">
+        <mc:Choice Requires="a14">
           <p:sp>
             <p:nvSpPr>
               <p:cNvPr id="3" name="Content Placeholder 2"/>
@@ -25945,7 +26020,7 @@
                       <m:fPr>
                         <m:type m:val="lin"/>
                         <m:ctrlPr>
-                          <a:rPr lang="en-US">
+                          <a:rPr lang="en-US" i="1">
                             <a:solidFill>
                               <a:srgbClr val="000000"/>
                             </a:solidFill>
@@ -25991,7 +26066,7 @@
                     <m:d>
                       <m:dPr>
                         <m:ctrlPr>
-                          <a:rPr lang="en-US">
+                          <a:rPr lang="en-US" i="1">
                             <a:solidFill>
                               <a:srgbClr val="000000"/>
                             </a:solidFill>
@@ -26004,7 +26079,7 @@
                           <m:fPr>
                             <m:type m:val="noBar"/>
                             <m:ctrlPr>
-                              <a:rPr lang="en-US">
+                              <a:rPr lang="en-US" i="1">
                                 <a:solidFill>
                                   <a:srgbClr val="000000"/>
                                 </a:solidFill>
@@ -26493,7 +26568,7 @@
             </p:txBody>
           </p:sp>
         </mc:Choice>
-        <mc:Fallback>
+        <mc:Fallback xmlns="">
           <p:sp>
             <p:nvSpPr>
               <p:cNvPr id="3" name="Content Placeholder 2"/>
@@ -26605,8 +26680,8 @@
           </a:p>
         </p:txBody>
       </p:sp>
-      <mc:AlternateContent xmlns:mc="http://schemas.openxmlformats.org/markup-compatibility/2006">
-        <mc:Choice xmlns:a14="http://schemas.microsoft.com/office/drawing/2010/main" Requires="a14">
+      <mc:AlternateContent xmlns:mc="http://schemas.openxmlformats.org/markup-compatibility/2006" xmlns:a14="http://schemas.microsoft.com/office/drawing/2010/main">
+        <mc:Choice Requires="a14">
           <p:sp>
             <p:nvSpPr>
               <p:cNvPr id="3" name="Content Placeholder 2"/>
@@ -27194,7 +27269,7 @@
                     <m:sSup>
                       <m:sSupPr>
                         <m:ctrlPr>
-                          <a:rPr lang="en-US">
+                          <a:rPr lang="en-US" i="1">
                             <a:solidFill>
                               <a:srgbClr val="000000"/>
                             </a:solidFill>
@@ -27249,7 +27324,7 @@
             </p:txBody>
           </p:sp>
         </mc:Choice>
-        <mc:Fallback>
+        <mc:Fallback xmlns="">
           <p:sp>
             <p:nvSpPr>
               <p:cNvPr id="3" name="Content Placeholder 2"/>
@@ -28543,7 +28618,7 @@
                     <m:sSub>
                       <m:sSubPr>
                         <m:ctrlPr>
-                          <a:rPr lang="en-US">
+                          <a:rPr lang="en-US" i="1">
                             <a:solidFill>
                               <a:srgbClr val="000000"/>
                             </a:solidFill>
@@ -28589,7 +28664,7 @@
                     <m:sSub>
                       <m:sSubPr>
                         <m:ctrlPr>
-                          <a:rPr lang="en-US">
+                          <a:rPr lang="en-US" i="1">
                             <a:solidFill>
                               <a:srgbClr val="000000"/>
                             </a:solidFill>
@@ -28698,7 +28773,22 @@
                       <a:srgbClr val="000000"/>
                     </a:solidFill>
                   </a:rPr>
-                  <a:t> (</a:t>
+                  <a:t> </a:t>
+                </a:r>
+                <a:br>
+                  <a:rPr lang="en-US" sz="1800" dirty="0">
+                    <a:solidFill>
+                      <a:srgbClr val="000000"/>
+                    </a:solidFill>
+                  </a:rPr>
+                </a:br>
+                <a:r>
+                  <a:rPr sz="1800" dirty="0">
+                    <a:solidFill>
+                      <a:srgbClr val="000000"/>
+                    </a:solidFill>
+                  </a:rPr>
+                  <a:t>(</a:t>
                 </a:r>
                 <a14:m>
                   <m:oMath xmlns:m="http://schemas.openxmlformats.org/officeDocument/2006/math">
@@ -29204,6 +29294,13 @@
                   </a:rPr>
                   <a:t>(randomizer)를 고르고 </a:t>
                 </a:r>
+                <a:br>
+                  <a:rPr lang="en-US" sz="1800" dirty="0">
+                    <a:solidFill>
+                      <a:srgbClr val="000000"/>
+                    </a:solidFill>
+                  </a:rPr>
+                </a:br>
                 <a14:m>
                   <m:oMath xmlns:m="http://schemas.openxmlformats.org/officeDocument/2006/math">
                     <m:r>
@@ -29299,7 +29396,46 @@
                       <a:srgbClr val="000000"/>
                     </a:solidFill>
                   </a:rPr>
-                  <a:t>h를 m비트씩 k조각으로 쪼갠다: </a:t>
+                  <a:t>h를 m비트씩 </a:t>
+                </a:r>
+                <a:r>
+                  <a:rPr sz="1800" dirty="0" err="1">
+                    <a:solidFill>
+                      <a:srgbClr val="000000"/>
+                    </a:solidFill>
+                  </a:rPr>
+                  <a:t>k조각으로</a:t>
+                </a:r>
+                <a:r>
+                  <a:rPr sz="1800" dirty="0">
+                    <a:solidFill>
+                      <a:srgbClr val="000000"/>
+                    </a:solidFill>
+                  </a:rPr>
+                  <a:t> </a:t>
+                </a:r>
+                <a:r>
+                  <a:rPr sz="1800" dirty="0" err="1">
+                    <a:solidFill>
+                      <a:srgbClr val="000000"/>
+                    </a:solidFill>
+                  </a:rPr>
+                  <a:t>쪼갠다</a:t>
+                </a:r>
+                <a:br>
+                  <a:rPr lang="en-US" sz="1800" dirty="0">
+                    <a:solidFill>
+                      <a:srgbClr val="000000"/>
+                    </a:solidFill>
+                  </a:rPr>
+                </a:br>
+                <a:r>
+                  <a:rPr sz="1800" dirty="0">
+                    <a:solidFill>
+                      <a:srgbClr val="000000"/>
+                    </a:solidFill>
+                  </a:rPr>
+                  <a:t>: </a:t>
                 </a:r>
                 <a14:m>
                   <m:oMath xmlns:m="http://schemas.openxmlformats.org/officeDocument/2006/math">
@@ -29501,7 +29637,7 @@
                     <m:sSub>
                       <m:sSubPr>
                         <m:ctrlPr>
-                          <a:rPr lang="en-US">
+                          <a:rPr lang="en-US" i="1">
                             <a:solidFill>
                               <a:srgbClr val="000000"/>
                             </a:solidFill>
@@ -29608,7 +29744,22 @@
                       <a:srgbClr val="000000"/>
                     </a:solidFill>
                   </a:rPr>
-                  <a:t> — h</a:t>
+                  <a:t> </a:t>
+                </a:r>
+                <a:br>
+                  <a:rPr lang="en-US" sz="1800" dirty="0">
+                    <a:solidFill>
+                      <a:srgbClr val="000000"/>
+                    </a:solidFill>
+                  </a:rPr>
+                </a:br>
+                <a:r>
+                  <a:rPr sz="1800" dirty="0">
+                    <a:solidFill>
+                      <a:srgbClr val="000000"/>
+                    </a:solidFill>
+                  </a:rPr>
+                  <a:t>— h</a:t>
                 </a:r>
                 <a:r>
                   <a:rPr sz="1800" baseline="-25000" dirty="0">
@@ -29902,7 +30053,7 @@
                     <m:sSub>
                       <m:sSubPr>
                         <m:ctrlPr>
-                          <a:rPr lang="en-US">
+                          <a:rPr lang="en-US" i="1">
                             <a:solidFill>
                               <a:srgbClr val="000000"/>
                             </a:solidFill>

--- a/presentation/1007_18_SPHINCS-FTS-and-Virtual-Hypertree.pptx
+++ b/presentation/1007_18_SPHINCS-FTS-and-Virtual-Hypertree.pptx
@@ -9725,7 +9725,7 @@
             <p:spPr>
               <a:xfrm>
                 <a:off x="838200" y="1295322"/>
-                <a:ext cx="5760720" cy="4701089"/>
+                <a:ext cx="6156158" cy="4701089"/>
               </a:xfrm>
             </p:spPr>
             <p:txBody>
@@ -10163,9 +10163,6 @@
                 </a:r>
               </a:p>
               <a:p>
-                <a:pPr marL="342900" indent="-342900">
-                  <a:buAutoNum type="arabicPeriod"/>
-                </a:pPr>
                 <a:r>
                   <a:rPr lang="ko-KR" altLang="en-US" sz="1800" dirty="0">
                     <a:solidFill>
@@ -10230,7 +10227,7 @@
                             <a:solidFill>
                               <a:srgbClr val="000000"/>
                             </a:solidFill>
-                            <a:latin typeface="Cambria Math"/>
+                            <a:latin typeface="Cambria Math" panose="02040503050406030204" pitchFamily="18" charset="0"/>
                           </a:rPr>
                         </m:ctrlPr>
                       </m:dPr>
@@ -10335,6 +10332,18 @@
                       </a:rPr>
                       <m:t> </m:t>
                     </m:r>
+                  </m:oMath>
+                </a14:m>
+                <a:br>
+                  <a:rPr lang="en-US" altLang="ko-KR" i="0" dirty="0">
+                    <a:solidFill>
+                      <a:srgbClr val="000000"/>
+                    </a:solidFill>
+                    <a:latin typeface="Cambria Math"/>
+                  </a:rPr>
+                </a:br>
+                <a14:m>
+                  <m:oMath xmlns:m="http://schemas.openxmlformats.org/officeDocument/2006/math">
                     <m:r>
                       <a:rPr lang="ko-KR" altLang="en-US" i="1">
                         <a:solidFill>
@@ -10351,7 +10360,7 @@
                             <a:solidFill>
                               <a:srgbClr val="000000"/>
                             </a:solidFill>
-                            <a:latin typeface="Cambria Math"/>
+                            <a:latin typeface="Cambria Math" panose="02040503050406030204" pitchFamily="18" charset="0"/>
                           </a:rPr>
                         </m:ctrlPr>
                       </m:dPr>
@@ -10392,18 +10401,6 @@
                         </m:sSub>
                       </m:e>
                     </m:d>
-                  </m:oMath>
-                </a14:m>
-                <a:br>
-                  <a:rPr lang="ko-KR" altLang="en-US" i="1" dirty="0">
-                    <a:solidFill>
-                      <a:srgbClr val="000000"/>
-                    </a:solidFill>
-                    <a:latin typeface="Cambria Math"/>
-                  </a:rPr>
-                </a:br>
-                <a14:m>
-                  <m:oMath xmlns:m="http://schemas.openxmlformats.org/officeDocument/2006/math">
                     <m:r>
                       <a:rPr lang="en-US" altLang="ko-KR" i="1">
                         <a:solidFill>
@@ -10596,12 +10593,12 @@
             <p:spPr>
               <a:xfrm>
                 <a:off x="838200" y="1295322"/>
-                <a:ext cx="5760720" cy="4701089"/>
+                <a:ext cx="6156158" cy="4701089"/>
               </a:xfrm>
               <a:blipFill>
                 <a:blip r:embed="rId2"/>
                 <a:stretch>
-                  <a:fillRect l="-635"/>
+                  <a:fillRect l="-595" r="-595"/>
                 </a:stretch>
               </a:blipFill>
             </p:spPr>
@@ -19572,8 +19569,8 @@
           </a:p>
         </p:txBody>
       </p:sp>
-      <mc:AlternateContent xmlns:mc="http://schemas.openxmlformats.org/markup-compatibility/2006" xmlns:a14="http://schemas.microsoft.com/office/drawing/2010/main">
-        <mc:Choice Requires="a14">
+      <mc:AlternateContent xmlns:mc="http://schemas.openxmlformats.org/markup-compatibility/2006">
+        <mc:Choice xmlns:a14="http://schemas.microsoft.com/office/drawing/2010/main" Requires="a14">
           <p:sp>
             <p:nvSpPr>
               <p:cNvPr id="3" name="Content Placeholder 2"/>
@@ -19587,7 +19584,7 @@
             <p:spPr>
               <a:xfrm>
                 <a:off x="838200" y="1295322"/>
-                <a:ext cx="5760720" cy="4701089"/>
+                <a:ext cx="5915526" cy="4701089"/>
               </a:xfrm>
             </p:spPr>
             <p:txBody>
@@ -19728,7 +19725,7 @@
             </p:txBody>
           </p:sp>
         </mc:Choice>
-        <mc:Fallback xmlns="">
+        <mc:Fallback>
           <p:sp>
             <p:nvSpPr>
               <p:cNvPr id="3" name="Content Placeholder 2"/>
@@ -19742,12 +19739,12 @@
             <p:spPr>
               <a:xfrm>
                 <a:off x="838200" y="1295322"/>
-                <a:ext cx="5760720" cy="4701089"/>
+                <a:ext cx="5915526" cy="4701089"/>
               </a:xfrm>
               <a:blipFill>
                 <a:blip r:embed="rId2"/>
                 <a:stretch>
-                  <a:fillRect l="-212" r="-741"/>
+                  <a:fillRect l="-206" r="-2062"/>
                 </a:stretch>
               </a:blipFill>
             </p:spPr>
@@ -19860,8 +19857,8 @@
           </a:p>
         </p:txBody>
       </p:sp>
-      <mc:AlternateContent xmlns:mc="http://schemas.openxmlformats.org/markup-compatibility/2006" xmlns:a14="http://schemas.microsoft.com/office/drawing/2010/main">
-        <mc:Choice Requires="a14">
+      <mc:AlternateContent xmlns:mc="http://schemas.openxmlformats.org/markup-compatibility/2006">
+        <mc:Choice xmlns:a14="http://schemas.microsoft.com/office/drawing/2010/main" Requires="a14">
           <p:sp>
             <p:nvSpPr>
               <p:cNvPr id="3" name="Content Placeholder 2"/>
@@ -19875,7 +19872,7 @@
             <p:spPr>
               <a:xfrm>
                 <a:off x="838200" y="1295322"/>
-                <a:ext cx="5760720" cy="4701089"/>
+                <a:ext cx="5610726" cy="4701089"/>
               </a:xfrm>
             </p:spPr>
             <p:txBody>
@@ -20547,7 +20544,7 @@
             </p:txBody>
           </p:sp>
         </mc:Choice>
-        <mc:Fallback xmlns="">
+        <mc:Fallback>
           <p:sp>
             <p:nvSpPr>
               <p:cNvPr id="3" name="Content Placeholder 2"/>
@@ -20561,12 +20558,12 @@
             <p:spPr>
               <a:xfrm>
                 <a:off x="838200" y="1295322"/>
-                <a:ext cx="5760720" cy="4701089"/>
+                <a:ext cx="5610726" cy="4701089"/>
               </a:xfrm>
               <a:blipFill>
                 <a:blip r:embed="rId2"/>
                 <a:stretch>
-                  <a:fillRect l="-635" r="-2116"/>
+                  <a:fillRect l="-652" r="-217"/>
                 </a:stretch>
               </a:blipFill>
             </p:spPr>
@@ -20679,8 +20676,8 @@
           </a:p>
         </p:txBody>
       </p:sp>
-      <mc:AlternateContent xmlns:mc="http://schemas.openxmlformats.org/markup-compatibility/2006" xmlns:a14="http://schemas.microsoft.com/office/drawing/2010/main">
-        <mc:Choice Requires="a14">
+      <mc:AlternateContent xmlns:mc="http://schemas.openxmlformats.org/markup-compatibility/2006">
+        <mc:Choice xmlns:a14="http://schemas.microsoft.com/office/drawing/2010/main" Requires="a14">
           <p:sp>
             <p:nvSpPr>
               <p:cNvPr id="3" name="Content Placeholder 2"/>
@@ -20694,7 +20691,7 @@
             <p:spPr>
               <a:xfrm>
                 <a:off x="838200" y="1295322"/>
-                <a:ext cx="5760720" cy="4701089"/>
+                <a:ext cx="5883442" cy="4701089"/>
               </a:xfrm>
             </p:spPr>
             <p:txBody>
@@ -21309,7 +21306,7 @@
             </p:txBody>
           </p:sp>
         </mc:Choice>
-        <mc:Fallback xmlns="">
+        <mc:Fallback>
           <p:sp>
             <p:nvSpPr>
               <p:cNvPr id="3" name="Content Placeholder 2"/>
@@ -21323,12 +21320,12 @@
             <p:spPr>
               <a:xfrm>
                 <a:off x="838200" y="1295322"/>
-                <a:ext cx="5760720" cy="4701089"/>
+                <a:ext cx="5883442" cy="4701089"/>
               </a:xfrm>
               <a:blipFill>
                 <a:blip r:embed="rId2"/>
                 <a:stretch>
-                  <a:fillRect l="-635" b="-1036"/>
+                  <a:fillRect l="-622"/>
                 </a:stretch>
               </a:blipFill>
             </p:spPr>
@@ -25773,7 +25770,55 @@
                   <a:srgbClr val="000000"/>
                 </a:solidFill>
               </a:rPr>
-              <a:t>어떤 키쌍을 썼는지 기억할 필요가 없다 — stateless</a:t>
+              <a:t>어떤 키쌍을 썼는지 기억할 </a:t>
+            </a:r>
+            <a:r>
+              <a:rPr sz="1800" dirty="0" err="1">
+                <a:solidFill>
+                  <a:srgbClr val="000000"/>
+                </a:solidFill>
+              </a:rPr>
+              <a:t>필요가</a:t>
+            </a:r>
+            <a:r>
+              <a:rPr sz="1800" dirty="0">
+                <a:solidFill>
+                  <a:srgbClr val="000000"/>
+                </a:solidFill>
+              </a:rPr>
+              <a:t> </a:t>
+            </a:r>
+            <a:r>
+              <a:rPr sz="1800" dirty="0" err="1">
+                <a:solidFill>
+                  <a:srgbClr val="000000"/>
+                </a:solidFill>
+              </a:rPr>
+              <a:t>없다</a:t>
+            </a:r>
+            <a:r>
+              <a:rPr lang="ko-KR" altLang="en-US" sz="1800" dirty="0">
+                <a:solidFill>
+                  <a:srgbClr val="000000"/>
+                </a:solidFill>
+              </a:rPr>
+              <a:t> </a:t>
+            </a:r>
+            <a:r>
+              <a:rPr lang="en-US" altLang="ko-KR" sz="1800" dirty="0">
+                <a:solidFill>
+                  <a:srgbClr val="000000"/>
+                </a:solidFill>
+              </a:rPr>
+              <a:t>—</a:t>
+            </a:r>
+            <a:r>
+              <a:rPr sz="1800" dirty="0">
+                <a:solidFill>
+                  <a:srgbClr val="000000"/>
+                </a:solidFill>
+              </a:rPr>
+              <a:t> stateless</a:t>
             </a:r>
           </a:p>
           <a:p>
@@ -28150,7 +28195,7 @@
             <p:spPr>
               <a:xfrm>
                 <a:off x="838200" y="1295322"/>
-                <a:ext cx="5760720" cy="4701089"/>
+                <a:ext cx="5928360" cy="4701089"/>
               </a:xfrm>
             </p:spPr>
             <p:txBody>
@@ -28184,7 +28229,23 @@
                       <a:srgbClr val="000000"/>
                     </a:solidFill>
                   </a:rPr>
-                  <a:t>, n비트 제2역상 저항 해시 </a:t>
+                  <a:t>, </a:t>
+                </a:r>
+                <a:r>
+                  <a:rPr sz="1800" dirty="0" err="1">
+                    <a:solidFill>
+                      <a:srgbClr val="000000"/>
+                    </a:solidFill>
+                  </a:rPr>
+                  <a:t>n비트</a:t>
+                </a:r>
+                <a:r>
+                  <a:rPr sz="1800" dirty="0">
+                    <a:solidFill>
+                      <a:srgbClr val="000000"/>
+                    </a:solidFill>
+                  </a:rPr>
+                  <a:t> 제2역상 저항 해시 </a:t>
                 </a:r>
                 <a14:m>
                   <m:oMath xmlns:m="http://schemas.openxmlformats.org/officeDocument/2006/math">
@@ -28659,6 +28720,13 @@
                   </a:rPr>
                   <a:t>에 대해 </a:t>
                 </a:r>
+                <a:br>
+                  <a:rPr lang="en-US" sz="1800" dirty="0">
+                    <a:solidFill>
+                      <a:srgbClr val="000000"/>
+                    </a:solidFill>
+                  </a:rPr>
+                </a:br>
                 <a14:m>
                   <m:oMath xmlns:m="http://schemas.openxmlformats.org/officeDocument/2006/math">
                     <m:sSub>
@@ -28773,22 +28841,7 @@
                       <a:srgbClr val="000000"/>
                     </a:solidFill>
                   </a:rPr>
-                  <a:t> </a:t>
-                </a:r>
-                <a:br>
-                  <a:rPr lang="en-US" sz="1800" dirty="0">
-                    <a:solidFill>
-                      <a:srgbClr val="000000"/>
-                    </a:solidFill>
-                  </a:rPr>
-                </a:br>
-                <a:r>
-                  <a:rPr sz="1800" dirty="0">
-                    <a:solidFill>
-                      <a:srgbClr val="000000"/>
-                    </a:solidFill>
-                  </a:rPr>
-                  <a:t>(</a:t>
+                  <a:t> (</a:t>
                 </a:r>
                 <a14:m>
                   <m:oMath xmlns:m="http://schemas.openxmlformats.org/officeDocument/2006/math">
@@ -29122,12 +29175,12 @@
             <p:spPr>
               <a:xfrm>
                 <a:off x="838200" y="1295322"/>
-                <a:ext cx="5760720" cy="4701089"/>
+                <a:ext cx="5928360" cy="4701089"/>
               </a:xfrm>
               <a:blipFill>
                 <a:blip r:embed="rId2"/>
                 <a:stretch>
-                  <a:fillRect l="-212"/>
+                  <a:fillRect l="-206"/>
                 </a:stretch>
               </a:blipFill>
             </p:spPr>
@@ -29759,10 +29812,18 @@
                       <a:srgbClr val="000000"/>
                     </a:solidFill>
                   </a:rPr>
-                  <a:t>— h</a:t>
+                  <a:t>— </a:t>
                 </a:r>
                 <a:r>
-                  <a:rPr sz="1800" baseline="-25000" dirty="0">
+                  <a:rPr dirty="0" err="1">
+                    <a:solidFill>
+                      <a:srgbClr val="000000"/>
+                    </a:solidFill>
+                  </a:rPr>
+                  <a:t>h</a:t>
+                </a:r>
+                <a:r>
+                  <a:rPr baseline="-25000" dirty="0" err="1">
                     <a:solidFill>
                       <a:srgbClr val="000000"/>
                     </a:solidFill>
@@ -29770,12 +29831,20 @@
                   <a:t>j</a:t>
                 </a:r>
                 <a:r>
-                  <a:rPr sz="1800" dirty="0">
+                  <a:rPr dirty="0" err="1">
                     <a:solidFill>
                       <a:srgbClr val="000000"/>
                     </a:solidFill>
                   </a:rPr>
-                  <a:t>가 가리키는 개인키 성분이다</a:t>
+                  <a:t>가</a:t>
+                </a:r>
+                <a:r>
+                  <a:rPr dirty="0">
+                    <a:solidFill>
+                      <a:srgbClr val="000000"/>
+                    </a:solidFill>
+                  </a:rPr>
+                  <a:t> 가리키는 개인키 성분이다</a:t>
                 </a:r>
               </a:p>
               <a:p>

--- a/presentation/1007_18_SPHINCS-FTS-and-Virtual-Hypertree.pptx
+++ b/presentation/1007_18_SPHINCS-FTS-and-Virtual-Hypertree.pptx
@@ -10163,8 +10163,9 @@
                 </a:r>
               </a:p>
               <a:p>
+                <a:pPr lvl="1"/>
                 <a:r>
-                  <a:rPr lang="ko-KR" altLang="en-US" sz="1800" dirty="0">
+                  <a:rPr lang="ko-KR" altLang="en-US" dirty="0">
                     <a:solidFill>
                       <a:srgbClr val="000000"/>
                     </a:solidFill>
@@ -10172,7 +10173,7 @@
                   <a:t>예</a:t>
                 </a:r>
                 <a:r>
-                  <a:rPr lang="en-US" altLang="ko-KR" sz="1800" dirty="0">
+                  <a:rPr lang="en-US" altLang="ko-KR" dirty="0">
                     <a:solidFill>
                       <a:srgbClr val="000000"/>
                     </a:solidFill>
@@ -10202,7 +10203,7 @@
                   </m:oMath>
                 </a14:m>
                 <a:r>
-                  <a:rPr lang="ko-KR" altLang="en-US" sz="1800" dirty="0">
+                  <a:rPr lang="ko-KR" altLang="en-US" dirty="0">
                     <a:solidFill>
                       <a:srgbClr val="000000"/>
                     </a:solidFill>
@@ -10563,14 +10564,14 @@
                   </m:oMath>
                 </a14:m>
                 <a:r>
-                  <a:rPr lang="ko-KR" altLang="en-US" sz="1800" dirty="0">
+                  <a:rPr lang="ko-KR" altLang="en-US" dirty="0">
                     <a:solidFill>
                       <a:srgbClr val="000000"/>
                     </a:solidFill>
                   </a:rPr>
                   <a:t>을 확인한다</a:t>
                 </a:r>
-                <a:endParaRPr sz="1800" dirty="0">
+                <a:endParaRPr dirty="0">
                   <a:solidFill>
                     <a:srgbClr val="000000"/>
                   </a:solidFill>
@@ -19569,8 +19570,8 @@
           </a:p>
         </p:txBody>
       </p:sp>
-      <mc:AlternateContent xmlns:mc="http://schemas.openxmlformats.org/markup-compatibility/2006">
-        <mc:Choice xmlns:a14="http://schemas.microsoft.com/office/drawing/2010/main" Requires="a14">
+      <mc:AlternateContent xmlns:mc="http://schemas.openxmlformats.org/markup-compatibility/2006" xmlns:a14="http://schemas.microsoft.com/office/drawing/2010/main">
+        <mc:Choice Requires="a14">
           <p:sp>
             <p:nvSpPr>
               <p:cNvPr id="3" name="Content Placeholder 2"/>
@@ -19725,7 +19726,7 @@
             </p:txBody>
           </p:sp>
         </mc:Choice>
-        <mc:Fallback>
+        <mc:Fallback xmlns="">
           <p:sp>
             <p:nvSpPr>
               <p:cNvPr id="3" name="Content Placeholder 2"/>
@@ -19857,8 +19858,8 @@
           </a:p>
         </p:txBody>
       </p:sp>
-      <mc:AlternateContent xmlns:mc="http://schemas.openxmlformats.org/markup-compatibility/2006">
-        <mc:Choice xmlns:a14="http://schemas.microsoft.com/office/drawing/2010/main" Requires="a14">
+      <mc:AlternateContent xmlns:mc="http://schemas.openxmlformats.org/markup-compatibility/2006" xmlns:a14="http://schemas.microsoft.com/office/drawing/2010/main">
+        <mc:Choice Requires="a14">
           <p:sp>
             <p:nvSpPr>
               <p:cNvPr id="3" name="Content Placeholder 2"/>
@@ -20544,7 +20545,7 @@
             </p:txBody>
           </p:sp>
         </mc:Choice>
-        <mc:Fallback>
+        <mc:Fallback xmlns="">
           <p:sp>
             <p:nvSpPr>
               <p:cNvPr id="3" name="Content Placeholder 2"/>
@@ -20676,8 +20677,8 @@
           </a:p>
         </p:txBody>
       </p:sp>
-      <mc:AlternateContent xmlns:mc="http://schemas.openxmlformats.org/markup-compatibility/2006">
-        <mc:Choice xmlns:a14="http://schemas.microsoft.com/office/drawing/2010/main" Requires="a14">
+      <mc:AlternateContent xmlns:mc="http://schemas.openxmlformats.org/markup-compatibility/2006" xmlns:a14="http://schemas.microsoft.com/office/drawing/2010/main">
+        <mc:Choice Requires="a14">
           <p:sp>
             <p:nvSpPr>
               <p:cNvPr id="3" name="Content Placeholder 2"/>
@@ -21306,7 +21307,7 @@
             </p:txBody>
           </p:sp>
         </mc:Choice>
-        <mc:Fallback>
+        <mc:Fallback xmlns="">
           <p:sp>
             <p:nvSpPr>
               <p:cNvPr id="3" name="Content Placeholder 2"/>
@@ -25770,31 +25771,7 @@
                   <a:srgbClr val="000000"/>
                 </a:solidFill>
               </a:rPr>
-              <a:t>어떤 키쌍을 썼는지 기억할 </a:t>
-            </a:r>
-            <a:r>
-              <a:rPr sz="1800" dirty="0" err="1">
-                <a:solidFill>
-                  <a:srgbClr val="000000"/>
-                </a:solidFill>
-              </a:rPr>
-              <a:t>필요가</a:t>
-            </a:r>
-            <a:r>
-              <a:rPr sz="1800" dirty="0">
-                <a:solidFill>
-                  <a:srgbClr val="000000"/>
-                </a:solidFill>
-              </a:rPr>
-              <a:t> </a:t>
-            </a:r>
-            <a:r>
-              <a:rPr sz="1800" dirty="0" err="1">
-                <a:solidFill>
-                  <a:srgbClr val="000000"/>
-                </a:solidFill>
-              </a:rPr>
-              <a:t>없다</a:t>
+              <a:t>어떤 키쌍을 썼는지 기억할 필요가 없다</a:t>
             </a:r>
             <a:r>
               <a:rPr lang="ko-KR" altLang="en-US" sz="1800" dirty="0">
@@ -28229,23 +28206,7 @@
                       <a:srgbClr val="000000"/>
                     </a:solidFill>
                   </a:rPr>
-                  <a:t>, </a:t>
-                </a:r>
-                <a:r>
-                  <a:rPr sz="1800" dirty="0" err="1">
-                    <a:solidFill>
-                      <a:srgbClr val="000000"/>
-                    </a:solidFill>
-                  </a:rPr>
-                  <a:t>n비트</a:t>
-                </a:r>
-                <a:r>
-                  <a:rPr sz="1800" dirty="0">
-                    <a:solidFill>
-                      <a:srgbClr val="000000"/>
-                    </a:solidFill>
-                  </a:rPr>
-                  <a:t> 제2역상 저항 해시 </a:t>
+                  <a:t>, n비트 제2역상 저항 해시 </a:t>
                 </a:r>
                 <a14:m>
                   <m:oMath xmlns:m="http://schemas.openxmlformats.org/officeDocument/2006/math">
@@ -29449,31 +29410,7 @@
                       <a:srgbClr val="000000"/>
                     </a:solidFill>
                   </a:rPr>
-                  <a:t>h를 m비트씩 </a:t>
-                </a:r>
-                <a:r>
-                  <a:rPr sz="1800" dirty="0" err="1">
-                    <a:solidFill>
-                      <a:srgbClr val="000000"/>
-                    </a:solidFill>
-                  </a:rPr>
-                  <a:t>k조각으로</a:t>
-                </a:r>
-                <a:r>
-                  <a:rPr sz="1800" dirty="0">
-                    <a:solidFill>
-                      <a:srgbClr val="000000"/>
-                    </a:solidFill>
-                  </a:rPr>
-                  <a:t> </a:t>
-                </a:r>
-                <a:r>
-                  <a:rPr sz="1800" dirty="0" err="1">
-                    <a:solidFill>
-                      <a:srgbClr val="000000"/>
-                    </a:solidFill>
-                  </a:rPr>
-                  <a:t>쪼갠다</a:t>
+                  <a:t>h를 m비트씩 k조각으로 쪼갠다</a:t>
                 </a:r>
                 <a:br>
                   <a:rPr lang="en-US" sz="1800" dirty="0">
@@ -29799,23 +29736,16 @@
                   </a:rPr>
                   <a:t> </a:t>
                 </a:r>
-                <a:br>
-                  <a:rPr lang="en-US" sz="1800" dirty="0">
-                    <a:solidFill>
-                      <a:srgbClr val="000000"/>
-                    </a:solidFill>
-                  </a:rPr>
-                </a:br>
+                <a:endParaRPr lang="en-US" sz="1800" dirty="0">
+                  <a:solidFill>
+                    <a:srgbClr val="000000"/>
+                  </a:solidFill>
+                </a:endParaRPr>
+              </a:p>
+              <a:p>
+                <a:pPr lvl="1"/>
                 <a:r>
-                  <a:rPr sz="1800" dirty="0">
-                    <a:solidFill>
-                      <a:srgbClr val="000000"/>
-                    </a:solidFill>
-                  </a:rPr>
-                  <a:t>— </a:t>
-                </a:r>
-                <a:r>
-                  <a:rPr dirty="0" err="1">
+                  <a:rPr dirty="0">
                     <a:solidFill>
                       <a:srgbClr val="000000"/>
                     </a:solidFill>
@@ -29823,7 +29753,7 @@
                   <a:t>h</a:t>
                 </a:r>
                 <a:r>
-                  <a:rPr baseline="-25000" dirty="0" err="1">
+                  <a:rPr baseline="-25000" dirty="0">
                     <a:solidFill>
                       <a:srgbClr val="000000"/>
                     </a:solidFill>
@@ -29831,20 +29761,12 @@
                   <a:t>j</a:t>
                 </a:r>
                 <a:r>
-                  <a:rPr dirty="0" err="1">
-                    <a:solidFill>
-                      <a:srgbClr val="000000"/>
-                    </a:solidFill>
-                  </a:rPr>
-                  <a:t>가</a:t>
-                </a:r>
-                <a:r>
                   <a:rPr dirty="0">
                     <a:solidFill>
                       <a:srgbClr val="000000"/>
                     </a:solidFill>
                   </a:rPr>
-                  <a:t> 가리키는 개인키 성분이다</a:t>
+                  <a:t>가 가리키는 개인키 성분이다</a:t>
                 </a:r>
               </a:p>
               <a:p>
